--- a/lectures/lecture02.pptx
+++ b/lectures/lecture02.pptx
@@ -23188,7 +23188,7 @@
                 </a:solidFill>
                 <a:latin typeface="Arial"/>
               </a:rPr>
-              <a:t>Выдаётся </a:t>
+              <a:t>После практики выдаётся </a:t>
             </a:r>
             <a:r>
               <a:rPr sz="1600" b="1" i="0">

--- a/lectures/lecture02.pptx
+++ b/lectures/lecture02.pptx
@@ -3404,7 +3404,7 @@
                 </a:solidFill>
                 <a:latin typeface="Arial"/>
               </a:rPr>
-              <a:t>Как это выглядит</a:t>
+              <a:t>Как это выглядит?</a:t>
             </a:r>
           </a:p>
         </p:txBody>
@@ -3663,7 +3663,7 @@
                 </a:solidFill>
                 <a:latin typeface="Arial"/>
               </a:rPr>
-              <a:t>Что видно на гистограмме</a:t>
+              <a:t>Что видно на гистограмме?</a:t>
             </a:r>
           </a:p>
         </p:txBody>
@@ -4561,7 +4561,7 @@
                 </a:solidFill>
                 <a:latin typeface="Arial"/>
               </a:rPr>
-              <a:t>Как это выглядит</a:t>
+              <a:t>Как это выглядит?</a:t>
             </a:r>
           </a:p>
         </p:txBody>
@@ -5709,7 +5709,7 @@
                 </a:solidFill>
                 <a:latin typeface="Arial"/>
               </a:rPr>
-              <a:t>Чего корреляция не показывает</a:t>
+              <a:t>Чего корреляция не показывает?</a:t>
             </a:r>
           </a:p>
         </p:txBody>
@@ -10829,7 +10829,7 @@
                 </a:solidFill>
                 <a:latin typeface="Arial"/>
               </a:rPr>
-              <a:t>Что было на прошлой лекции</a:t>
+              <a:t>Что было на прошлой лекции?</a:t>
             </a:r>
           </a:p>
         </p:txBody>
@@ -18603,7 +18603,7 @@
                 </a:solidFill>
                 <a:latin typeface="Arial"/>
               </a:rPr>
-              <a:t>Почему час нельзя кодировать числом</a:t>
+              <a:t>Почему час нельзя кодировать числом?</a:t>
             </a:r>
           </a:p>
         </p:txBody>
@@ -19222,7 +19222,7 @@
                 </a:solidFill>
                 <a:latin typeface="Arial"/>
               </a:rPr>
-              <a:t>Зачем смотреть на данные глазами</a:t>
+              <a:t>Зачем смотреть на данные глазами?</a:t>
             </a:r>
           </a:p>
         </p:txBody>
@@ -20916,7 +20916,7 @@
                 </a:solidFill>
                 <a:latin typeface="Arial"/>
               </a:rPr>
-              <a:t>Почему обработка «руками» течёт</a:t>
+              <a:t>Почему обработка «руками» течёт?</a:t>
             </a:r>
           </a:p>
         </p:txBody>
@@ -22677,7 +22677,7 @@
                 </a:solidFill>
                 <a:latin typeface="Arial"/>
               </a:rPr>
-              <a:t>Что нужно унести с лекции</a:t>
+              <a:t>Что нужно унести с лекции?</a:t>
             </a:r>
           </a:p>
         </p:txBody>
@@ -23052,7 +23052,7 @@
                 </a:solidFill>
                 <a:latin typeface="Arial"/>
               </a:rPr>
-              <a:t>Что дальше</a:t>
+              <a:t>Что дальше?</a:t>
             </a:r>
           </a:p>
         </p:txBody>

--- a/lectures/lecture02.pptx
+++ b/lectures/lecture02.pptx
@@ -11668,7 +11668,16 @@
                 </a:solidFill>
                 <a:latin typeface="Arial"/>
               </a:rPr>
-              <a:t>Проверять надо до разбиения данных: `df.duplicated().sum()`</a:t>
+              <a:t>Проверять надо до разбиения данных: </a:t>
+            </a:r>
+            <a:r>
+              <a:rPr sz="1800" b="0" i="0">
+                <a:solidFill>
+                  <a:srgbClr val="181D27"/>
+                </a:solidFill>
+                <a:latin typeface="Courier New"/>
+              </a:rPr>
+              <a:t>df.duplicated().sum()</a:t>
             </a:r>
           </a:p>
         </p:txBody>
@@ -13929,9 +13938,18 @@
                 <a:solidFill>
                   <a:srgbClr val="181D27"/>
                 </a:solidFill>
-                <a:latin typeface="Arial"/>
-              </a:rPr>
-              <a:t>`drop="first"` убирает избыточный столбец</a:t>
+                <a:latin typeface="Courier New"/>
+              </a:rPr>
+              <a:t>drop="first"</a:t>
+            </a:r>
+            <a:r>
+              <a:rPr sz="1600" b="0" i="0">
+                <a:solidFill>
+                  <a:srgbClr val="181D27"/>
+                </a:solidFill>
+                <a:latin typeface="Arial"/>
+              </a:rPr>
+              <a:t> убирает избыточный столбец</a:t>
             </a:r>
           </a:p>
         </p:txBody>
@@ -19005,7 +19023,25 @@
                 </a:solidFill>
                 <a:latin typeface="Arial"/>
               </a:rPr>
-              <a:t> — `class_weight="balanced"`, самый простой и часто достаточный приём</a:t>
+              <a:t> — </a:t>
+            </a:r>
+            <a:r>
+              <a:rPr sz="1800" b="0" i="0">
+                <a:solidFill>
+                  <a:srgbClr val="181D27"/>
+                </a:solidFill>
+                <a:latin typeface="Courier New"/>
+              </a:rPr>
+              <a:t>class_weight="balanced"</a:t>
+            </a:r>
+            <a:r>
+              <a:rPr sz="1800" b="0" i="0">
+                <a:solidFill>
+                  <a:srgbClr val="181D27"/>
+                </a:solidFill>
+                <a:latin typeface="Arial"/>
+              </a:rPr>
+              <a:t>, самый простой и часто достаточный приём</a:t>
             </a:r>
           </a:p>
           <a:p>
@@ -24857,9 +24893,18 @@
                 <a:solidFill>
                   <a:srgbClr val="181D27"/>
                 </a:solidFill>
-                <a:latin typeface="Arial"/>
-              </a:rPr>
-              <a:t>`value_counts()` — то же числами</a:t>
+                <a:latin typeface="Courier New"/>
+              </a:rPr>
+              <a:t>value_counts()</a:t>
+            </a:r>
+            <a:r>
+              <a:rPr sz="1600" b="0" i="0">
+                <a:solidFill>
+                  <a:srgbClr val="181D27"/>
+                </a:solidFill>
+                <a:latin typeface="Arial"/>
+              </a:rPr>
+              <a:t> — то же числами</a:t>
             </a:r>
           </a:p>
           <a:p>

--- a/lectures/lecture02.pptx
+++ b/lectures/lecture02.pptx
@@ -3341,7 +3341,7 @@
           <a:p>
             <a:pPr algn="l"/>
             <a:r>
-              <a:rPr sz="1600" b="0" i="0">
+              <a:rPr sz="1700" b="0" i="0">
                 <a:solidFill>
                   <a:srgbClr val="181D27"/>
                 </a:solidFill>
@@ -3469,7 +3469,7 @@
             <a:r>
               <a:rPr sz="2000" b="0" i="0">
                 <a:solidFill>
-                  <a:srgbClr val="6B7484"/>
+                  <a:srgbClr val="181D27"/>
                 </a:solidFill>
                 <a:latin typeface="Arial"/>
               </a:rPr>
@@ -3511,7 +3511,7 @@
         <p:spPr>
           <a:xfrm>
             <a:off x="777240" y="5511169"/>
-            <a:ext cx="10637215" cy="827024"/>
+            <a:ext cx="10637215" cy="861568"/>
           </a:xfrm>
           <a:prstGeom prst="rect">
             <a:avLst/>
@@ -3530,9 +3530,9 @@
               </a:lnSpc>
             </a:pPr>
             <a:r>
-              <a:rPr sz="1600" b="0" i="0">
-                <a:solidFill>
-                  <a:srgbClr val="6B7484"/>
+              <a:rPr sz="1700" b="0" i="0">
+                <a:solidFill>
+                  <a:srgbClr val="181D27"/>
                 </a:solidFill>
                 <a:latin typeface="Arial"/>
               </a:rPr>
@@ -3866,9 +3866,9 @@
               <a:buChar char="·"/>
             </a:pPr>
             <a:r>
-              <a:rPr sz="1600" b="0" i="0">
-                <a:solidFill>
-                  <a:srgbClr val="6B7484"/>
+              <a:rPr sz="1700" b="0" i="0">
+                <a:solidFill>
+                  <a:srgbClr val="181D27"/>
                 </a:solidFill>
                 <a:latin typeface="Arial"/>
               </a:rPr>
@@ -4067,7 +4067,7 @@
         <p:spPr>
           <a:xfrm>
             <a:off x="777240" y="5282240"/>
-            <a:ext cx="10637215" cy="827024"/>
+            <a:ext cx="10637215" cy="861568"/>
           </a:xfrm>
           <a:prstGeom prst="rect">
             <a:avLst/>
@@ -4086,9 +4086,9 @@
               </a:lnSpc>
             </a:pPr>
             <a:r>
-              <a:rPr sz="1600" b="0" i="0">
-                <a:solidFill>
-                  <a:srgbClr val="6B7484"/>
+              <a:rPr sz="1700" b="0" i="0">
+                <a:solidFill>
+                  <a:srgbClr val="181D27"/>
                 </a:solidFill>
                 <a:latin typeface="Arial"/>
               </a:rPr>
@@ -4284,7 +4284,7 @@
             <a:r>
               <a:rPr sz="2000" b="0" i="0">
                 <a:solidFill>
-                  <a:srgbClr val="6B7484"/>
+                  <a:srgbClr val="181D27"/>
                 </a:solidFill>
                 <a:latin typeface="Arial"/>
               </a:rPr>
@@ -4626,7 +4626,7 @@
             <a:r>
               <a:rPr sz="2000" b="0" i="0">
                 <a:solidFill>
-                  <a:srgbClr val="6B7484"/>
+                  <a:srgbClr val="181D27"/>
                 </a:solidFill>
                 <a:latin typeface="Arial"/>
               </a:rPr>
@@ -4668,7 +4668,7 @@
         <p:spPr>
           <a:xfrm>
             <a:off x="777240" y="5509889"/>
-            <a:ext cx="10637215" cy="827024"/>
+            <a:ext cx="10637215" cy="861568"/>
           </a:xfrm>
           <a:prstGeom prst="rect">
             <a:avLst/>
@@ -4687,9 +4687,9 @@
               </a:lnSpc>
             </a:pPr>
             <a:r>
-              <a:rPr sz="1600" b="0" i="0">
-                <a:solidFill>
-                  <a:srgbClr val="6B7484"/>
+              <a:rPr sz="1700" b="0" i="0">
+                <a:solidFill>
+                  <a:srgbClr val="181D27"/>
                 </a:solidFill>
                 <a:latin typeface="Arial"/>
               </a:rPr>
@@ -4964,9 +4964,9 @@
               </a:lnSpc>
             </a:pPr>
             <a:r>
-              <a:rPr sz="1700" b="0" i="0">
-                <a:solidFill>
-                  <a:srgbClr val="6B7484"/>
+              <a:rPr sz="1800" b="0" i="0">
+                <a:solidFill>
+                  <a:srgbClr val="181D27"/>
                 </a:solidFill>
                 <a:latin typeface="Arial"/>
               </a:rPr>
@@ -5162,7 +5162,7 @@
             <a:r>
               <a:rPr sz="2000" b="0" i="0">
                 <a:solidFill>
-                  <a:srgbClr val="6B7484"/>
+                  <a:srgbClr val="181D27"/>
                 </a:solidFill>
                 <a:latin typeface="Arial"/>
               </a:rPr>
@@ -5356,9 +5356,9 @@
               </a:lnSpc>
             </a:pPr>
             <a:r>
-              <a:rPr sz="1600" b="0" i="0">
-                <a:solidFill>
-                  <a:srgbClr val="6B7484"/>
+              <a:rPr sz="1700" b="0" i="0">
+                <a:solidFill>
+                  <a:srgbClr val="181D27"/>
                 </a:solidFill>
                 <a:latin typeface="Arial"/>
               </a:rPr>
@@ -5540,8 +5540,8 @@
         </p:blipFill>
         <p:spPr>
           <a:xfrm>
-            <a:off x="2334999" y="1572768"/>
-            <a:ext cx="7521697" cy="3678936"/>
+            <a:off x="2387969" y="1572768"/>
+            <a:ext cx="7415757" cy="3627120"/>
           </a:xfrm>
           <a:prstGeom prst="rect">
             <a:avLst/>
@@ -5556,8 +5556,8 @@
         </p:nvSpPr>
         <p:spPr>
           <a:xfrm>
-            <a:off x="777240" y="5452872"/>
-            <a:ext cx="10637215" cy="1103376"/>
+            <a:off x="777240" y="5401056"/>
+            <a:ext cx="10637215" cy="1155192"/>
           </a:xfrm>
           <a:prstGeom prst="rect">
             <a:avLst/>
@@ -5576,9 +5576,9 @@
               </a:lnSpc>
             </a:pPr>
             <a:r>
-              <a:rPr sz="1600" b="0" i="0">
-                <a:solidFill>
-                  <a:srgbClr val="6B7484"/>
+              <a:rPr sz="1700" b="0" i="0">
+                <a:solidFill>
+                  <a:srgbClr val="181D27"/>
                 </a:solidFill>
                 <a:latin typeface="Arial"/>
               </a:rPr>
@@ -5802,7 +5802,7 @@
               <a:buChar char="—"/>
             </a:pPr>
             <a:r>
-              <a:rPr sz="1600" b="0" i="0">
+              <a:rPr sz="1700" b="0" i="0">
                 <a:solidFill>
                   <a:srgbClr val="181D27"/>
                 </a:solidFill>
@@ -5826,7 +5826,7 @@
               <a:buChar char="—"/>
             </a:pPr>
             <a:r>
-              <a:rPr sz="1600" b="0" i="0">
+              <a:rPr sz="1700" b="0" i="0">
                 <a:solidFill>
                   <a:srgbClr val="181D27"/>
                 </a:solidFill>
@@ -5850,7 +5850,7 @@
               <a:buChar char="—"/>
             </a:pPr>
             <a:r>
-              <a:rPr sz="1600" b="1" i="0">
+              <a:rPr sz="1700" b="1" i="0">
                 <a:solidFill>
                   <a:srgbClr val="181D27"/>
                 </a:solidFill>
@@ -5859,7 +5859,7 @@
               <a:t>Вывод:</a:t>
             </a:r>
             <a:r>
-              <a:rPr sz="1600" b="0" i="0">
+              <a:rPr sz="1700" b="0" i="0">
                 <a:solidFill>
                   <a:srgbClr val="181D27"/>
                 </a:solidFill>
@@ -5928,7 +5928,7 @@
               <a:buChar char="—"/>
             </a:pPr>
             <a:r>
-              <a:rPr sz="1600" b="0" i="0">
+              <a:rPr sz="1700" b="0" i="0">
                 <a:solidFill>
                   <a:srgbClr val="181D27"/>
                 </a:solidFill>
@@ -5952,7 +5952,7 @@
               <a:buChar char="—"/>
             </a:pPr>
             <a:r>
-              <a:rPr sz="1600" b="0" i="0">
+              <a:rPr sz="1700" b="0" i="0">
                 <a:solidFill>
                   <a:srgbClr val="181D27"/>
                 </a:solidFill>
@@ -5976,7 +5976,7 @@
               <a:buChar char="—"/>
             </a:pPr>
             <a:r>
-              <a:rPr sz="1600" b="1" i="0">
+              <a:rPr sz="1700" b="1" i="0">
                 <a:solidFill>
                   <a:srgbClr val="181D27"/>
                 </a:solidFill>
@@ -5985,7 +5985,7 @@
               <a:t>Вывод:</a:t>
             </a:r>
             <a:r>
-              <a:rPr sz="1600" b="0" i="0">
+              <a:rPr sz="1700" b="0" i="0">
                 <a:solidFill>
                   <a:srgbClr val="181D27"/>
                 </a:solidFill>
@@ -6186,7 +6186,7 @@
         <p:spPr>
           <a:xfrm>
             <a:off x="777240" y="4615731"/>
-            <a:ext cx="10637215" cy="827024"/>
+            <a:ext cx="10637215" cy="861568"/>
           </a:xfrm>
           <a:prstGeom prst="rect">
             <a:avLst/>
@@ -6205,9 +6205,9 @@
               </a:lnSpc>
             </a:pPr>
             <a:r>
-              <a:rPr sz="1600" b="0" i="0">
-                <a:solidFill>
-                  <a:srgbClr val="6B7484"/>
+              <a:rPr sz="1700" b="0" i="0">
+                <a:solidFill>
+                  <a:srgbClr val="181D27"/>
                 </a:solidFill>
                 <a:latin typeface="Arial"/>
               </a:rPr>
@@ -6426,9 +6426,9 @@
               </a:lnSpc>
             </a:pPr>
             <a:r>
-              <a:rPr sz="1700" b="0" i="0">
-                <a:solidFill>
-                  <a:srgbClr val="6B7484"/>
+              <a:rPr sz="1800" b="0" i="0">
+                <a:solidFill>
+                  <a:srgbClr val="181D27"/>
                 </a:solidFill>
                 <a:latin typeface="Arial"/>
               </a:rPr>
@@ -6624,7 +6624,7 @@
             <a:r>
               <a:rPr sz="2000" b="0" i="0">
                 <a:solidFill>
-                  <a:srgbClr val="6B7484"/>
+                  <a:srgbClr val="181D27"/>
                 </a:solidFill>
                 <a:latin typeface="Arial"/>
               </a:rPr>
@@ -7016,7 +7016,7 @@
             <a:r>
               <a:rPr sz="1800" b="0" i="0">
                 <a:solidFill>
-                  <a:srgbClr val="6B7484"/>
+                  <a:srgbClr val="181D27"/>
                 </a:solidFill>
                 <a:latin typeface="Arial"/>
               </a:rPr>
@@ -7333,7 +7333,7 @@
               </a:lnSpc>
             </a:pPr>
             <a:r>
-              <a:rPr sz="1600" b="0" i="0">
+              <a:rPr sz="1700" b="0" i="0">
                 <a:solidFill>
                   <a:srgbClr val="181D27"/>
                 </a:solidFill>
@@ -7368,7 +7368,7 @@
           <a:p>
             <a:pPr algn="l"/>
             <a:r>
-              <a:rPr sz="1600" b="1" i="0">
+              <a:rPr sz="1700" b="1" i="0">
                 <a:solidFill>
                   <a:srgbClr val="2B5CE6"/>
                 </a:solidFill>
@@ -7413,7 +7413,7 @@
               </a:lnSpc>
             </a:pPr>
             <a:r>
-              <a:rPr sz="1600" b="0" i="0">
+              <a:rPr sz="1700" b="0" i="0">
                 <a:solidFill>
                   <a:srgbClr val="181D27"/>
                 </a:solidFill>
@@ -7448,7 +7448,7 @@
           <a:p>
             <a:pPr algn="l"/>
             <a:r>
-              <a:rPr sz="1600" b="1" i="0">
+              <a:rPr sz="1700" b="1" i="0">
                 <a:solidFill>
                   <a:srgbClr val="2B5CE6"/>
                 </a:solidFill>
@@ -7493,7 +7493,7 @@
               </a:lnSpc>
             </a:pPr>
             <a:r>
-              <a:rPr sz="1600" b="0" i="0">
+              <a:rPr sz="1700" b="0" i="0">
                 <a:solidFill>
                   <a:srgbClr val="181D27"/>
                 </a:solidFill>
@@ -7528,7 +7528,7 @@
           <a:p>
             <a:pPr algn="l"/>
             <a:r>
-              <a:rPr sz="1600" b="1" i="0">
+              <a:rPr sz="1700" b="1" i="0">
                 <a:solidFill>
                   <a:srgbClr val="2B5CE6"/>
                 </a:solidFill>
@@ -7573,7 +7573,7 @@
               </a:lnSpc>
             </a:pPr>
             <a:r>
-              <a:rPr sz="1600" b="0" i="0">
+              <a:rPr sz="1700" b="0" i="0">
                 <a:solidFill>
                   <a:srgbClr val="181D27"/>
                 </a:solidFill>
@@ -7608,7 +7608,7 @@
           <a:p>
             <a:pPr algn="l"/>
             <a:r>
-              <a:rPr sz="1600" b="1" i="0">
+              <a:rPr sz="1700" b="1" i="0">
                 <a:solidFill>
                   <a:srgbClr val="2B5CE6"/>
                 </a:solidFill>
@@ -7643,9 +7643,9 @@
           <a:p>
             <a:pPr algn="ctr"/>
             <a:r>
-              <a:rPr sz="1700" b="0" i="1">
-                <a:solidFill>
-                  <a:srgbClr val="6B7484"/>
+              <a:rPr sz="1800" b="0" i="1">
+                <a:solidFill>
+                  <a:srgbClr val="181D27"/>
                 </a:solidFill>
                 <a:latin typeface="Arial"/>
               </a:rPr>
@@ -7847,7 +7847,7 @@
             <a:r>
               <a:rPr sz="1800" b="0" i="0">
                 <a:solidFill>
-                  <a:srgbClr val="6B7484"/>
+                  <a:srgbClr val="181D27"/>
                 </a:solidFill>
                 <a:latin typeface="Arial"/>
               </a:rPr>
@@ -7865,7 +7865,7 @@
         <p:spPr>
           <a:xfrm>
             <a:off x="777240" y="2487168"/>
-            <a:ext cx="10637215" cy="461010"/>
+            <a:ext cx="10637215" cy="448056"/>
           </a:xfrm>
           <a:prstGeom prst="roundRect">
             <a:avLst>
@@ -7909,7 +7909,7 @@
         </p:nvSpPr>
         <p:spPr>
           <a:xfrm>
-            <a:off x="1051560" y="2580513"/>
+            <a:off x="1051560" y="2574036"/>
             <a:ext cx="457200" cy="292608"/>
           </a:xfrm>
           <a:prstGeom prst="rect">
@@ -7944,8 +7944,8 @@
         </p:nvSpPr>
         <p:spPr>
           <a:xfrm>
-            <a:off x="777240" y="3057906"/>
-            <a:ext cx="10637215" cy="461010"/>
+            <a:off x="777240" y="3044952"/>
+            <a:ext cx="10637215" cy="448056"/>
           </a:xfrm>
           <a:prstGeom prst="roundRect">
             <a:avLst>
@@ -7989,7 +7989,7 @@
         </p:nvSpPr>
         <p:spPr>
           <a:xfrm>
-            <a:off x="1051560" y="3151251"/>
+            <a:off x="1051560" y="3131820"/>
             <a:ext cx="457200" cy="292608"/>
           </a:xfrm>
           <a:prstGeom prst="rect">
@@ -8024,8 +8024,8 @@
         </p:nvSpPr>
         <p:spPr>
           <a:xfrm>
-            <a:off x="777240" y="3628644"/>
-            <a:ext cx="10637215" cy="461010"/>
+            <a:off x="777240" y="3602736"/>
+            <a:ext cx="10637215" cy="448056"/>
           </a:xfrm>
           <a:prstGeom prst="roundRect">
             <a:avLst>
@@ -8069,7 +8069,7 @@
         </p:nvSpPr>
         <p:spPr>
           <a:xfrm>
-            <a:off x="1051560" y="3721989"/>
+            <a:off x="1051560" y="3689604"/>
             <a:ext cx="457200" cy="292608"/>
           </a:xfrm>
           <a:prstGeom prst="rect">
@@ -8104,8 +8104,8 @@
         </p:nvSpPr>
         <p:spPr>
           <a:xfrm>
-            <a:off x="777240" y="4199382"/>
-            <a:ext cx="10637215" cy="461010"/>
+            <a:off x="777240" y="4160520"/>
+            <a:ext cx="10637215" cy="448056"/>
           </a:xfrm>
           <a:prstGeom prst="roundRect">
             <a:avLst>
@@ -8151,7 +8151,7 @@
         </p:nvSpPr>
         <p:spPr>
           <a:xfrm>
-            <a:off x="1051560" y="4292727"/>
+            <a:off x="1051560" y="4247388"/>
             <a:ext cx="457200" cy="292608"/>
           </a:xfrm>
           <a:prstGeom prst="rect">
@@ -8186,7 +8186,7 @@
         </p:nvSpPr>
         <p:spPr>
           <a:xfrm>
-            <a:off x="10317175" y="4311015"/>
+            <a:off x="10317175" y="4265676"/>
             <a:ext cx="822960" cy="274320"/>
           </a:xfrm>
           <a:prstGeom prst="rect">
@@ -8221,8 +8221,8 @@
         </p:nvSpPr>
         <p:spPr>
           <a:xfrm>
-            <a:off x="777240" y="4898136"/>
-            <a:ext cx="10637215" cy="1356360"/>
+            <a:off x="777240" y="4846320"/>
+            <a:ext cx="10637215" cy="1408176"/>
           </a:xfrm>
           <a:prstGeom prst="roundRect">
             <a:avLst>
@@ -8247,7 +8247,7 @@
               </a:lnSpc>
             </a:pPr>
             <a:r>
-              <a:rPr sz="1700" b="0" i="0">
+              <a:rPr sz="1800" b="0" i="0">
                 <a:solidFill>
                   <a:srgbClr val="181D27"/>
                 </a:solidFill>
@@ -8583,9 +8583,9 @@
               <a:buChar char="·"/>
             </a:pPr>
             <a:r>
-              <a:rPr sz="1600" b="0" i="0">
-                <a:solidFill>
-                  <a:srgbClr val="6B7484"/>
+              <a:rPr sz="1700" b="0" i="0">
+                <a:solidFill>
+                  <a:srgbClr val="181D27"/>
                 </a:solidFill>
                 <a:latin typeface="Arial"/>
               </a:rPr>
@@ -8767,8 +8767,8 @@
         </p:blipFill>
         <p:spPr>
           <a:xfrm>
-            <a:off x="1813800" y="1572768"/>
-            <a:ext cx="8564096" cy="3955288"/>
+            <a:off x="1851198" y="1572768"/>
+            <a:ext cx="8489300" cy="3920744"/>
           </a:xfrm>
           <a:prstGeom prst="rect">
             <a:avLst/>
@@ -8783,8 +8783,8 @@
         </p:nvSpPr>
         <p:spPr>
           <a:xfrm>
-            <a:off x="777240" y="5729224"/>
-            <a:ext cx="10637215" cy="827024"/>
+            <a:off x="777240" y="5694680"/>
+            <a:ext cx="10637215" cy="861568"/>
           </a:xfrm>
           <a:prstGeom prst="rect">
             <a:avLst/>
@@ -8803,9 +8803,9 @@
               </a:lnSpc>
             </a:pPr>
             <a:r>
-              <a:rPr sz="1600" b="0" i="0">
-                <a:solidFill>
-                  <a:srgbClr val="6B7484"/>
+              <a:rPr sz="1700" b="0" i="0">
+                <a:solidFill>
+                  <a:srgbClr val="181D27"/>
                 </a:solidFill>
                 <a:latin typeface="Arial"/>
               </a:rPr>
@@ -9008,7 +9008,7 @@
                       <a:r>
                         <a:rPr sz="1500" b="1" i="0">
                           <a:solidFill>
-                            <a:srgbClr val="6B7484"/>
+                            <a:srgbClr val="181D27"/>
                           </a:solidFill>
                           <a:latin typeface="Arial"/>
                         </a:rPr>
@@ -9044,7 +9044,7 @@
                       <a:r>
                         <a:rPr sz="1500" b="1" i="0">
                           <a:solidFill>
-                            <a:srgbClr val="6B7484"/>
+                            <a:srgbClr val="181D27"/>
                           </a:solidFill>
                           <a:latin typeface="Arial"/>
                         </a:rPr>
@@ -9080,7 +9080,7 @@
                       <a:r>
                         <a:rPr sz="1500" b="1" i="0">
                           <a:solidFill>
-                            <a:srgbClr val="6B7484"/>
+                            <a:srgbClr val="181D27"/>
                           </a:solidFill>
                           <a:latin typeface="Arial"/>
                         </a:rPr>
@@ -10204,9 +10204,9 @@
               </a:lnSpc>
             </a:pPr>
             <a:r>
-              <a:rPr sz="1600" b="0" i="0">
-                <a:solidFill>
-                  <a:srgbClr val="6B7484"/>
+              <a:rPr sz="1700" b="0" i="0">
+                <a:solidFill>
+                  <a:srgbClr val="181D27"/>
                 </a:solidFill>
                 <a:latin typeface="Arial"/>
               </a:rPr>
@@ -10443,7 +10443,7 @@
               <a:buChar char="—"/>
             </a:pPr>
             <a:r>
-              <a:rPr sz="1600" b="0" i="0">
+              <a:rPr sz="1700" b="0" i="0">
                 <a:solidFill>
                   <a:srgbClr val="181D27"/>
                 </a:solidFill>
@@ -10467,7 +10467,7 @@
               <a:buChar char="—"/>
             </a:pPr>
             <a:r>
-              <a:rPr sz="1600" b="0" i="0">
+              <a:rPr sz="1700" b="0" i="0">
                 <a:solidFill>
                   <a:srgbClr val="181D27"/>
                 </a:solidFill>
@@ -10491,7 +10491,7 @@
               <a:buChar char="—"/>
             </a:pPr>
             <a:r>
-              <a:rPr sz="1600" b="0" i="0">
+              <a:rPr sz="1700" b="0" i="0">
                 <a:solidFill>
                   <a:srgbClr val="181D27"/>
                 </a:solidFill>
@@ -10515,7 +10515,7 @@
               <a:buChar char="—"/>
             </a:pPr>
             <a:r>
-              <a:rPr sz="1600" b="0" i="0">
+              <a:rPr sz="1700" b="0" i="0">
                 <a:solidFill>
                   <a:srgbClr val="181D27"/>
                 </a:solidFill>
@@ -10597,7 +10597,7 @@
               <a:buChar char="—"/>
             </a:pPr>
             <a:r>
-              <a:rPr sz="1600" b="1" i="0">
+              <a:rPr sz="1700" b="1" i="0">
                 <a:solidFill>
                   <a:srgbClr val="181D27"/>
                 </a:solidFill>
@@ -10606,7 +10606,7 @@
               <a:t>Ошибка в данных</a:t>
             </a:r>
             <a:r>
-              <a:rPr sz="1600" b="0" i="0">
+              <a:rPr sz="1700" b="0" i="0">
                 <a:solidFill>
                   <a:srgbClr val="181D27"/>
                 </a:solidFill>
@@ -10630,7 +10630,7 @@
               <a:buChar char="—"/>
             </a:pPr>
             <a:r>
-              <a:rPr sz="1600" b="1" i="0">
+              <a:rPr sz="1700" b="1" i="0">
                 <a:solidFill>
                   <a:srgbClr val="181D27"/>
                 </a:solidFill>
@@ -10639,7 +10639,7 @@
               <a:t>Реальное редкое значение</a:t>
             </a:r>
             <a:r>
-              <a:rPr sz="1600" b="0" i="0">
+              <a:rPr sz="1700" b="0" i="0">
                 <a:solidFill>
                   <a:srgbClr val="181D27"/>
                 </a:solidFill>
@@ -10663,7 +10663,7 @@
               <a:buChar char="—"/>
             </a:pPr>
             <a:r>
-              <a:rPr sz="1600" b="1" i="0">
+              <a:rPr sz="1700" b="1" i="0">
                 <a:solidFill>
                   <a:srgbClr val="181D27"/>
                 </a:solidFill>
@@ -10672,7 +10672,7 @@
               <a:t>Мешает линейной модели</a:t>
             </a:r>
             <a:r>
-              <a:rPr sz="1600" b="0" i="0">
+              <a:rPr sz="1700" b="0" i="0">
                 <a:solidFill>
                   <a:srgbClr val="181D27"/>
                 </a:solidFill>
@@ -10696,7 +10696,7 @@
               <a:buChar char="—"/>
             </a:pPr>
             <a:r>
-              <a:rPr sz="1600" b="0" i="0">
+              <a:rPr sz="1700" b="0" i="0">
                 <a:solidFill>
                   <a:srgbClr val="181D27"/>
                 </a:solidFill>
@@ -11206,7 +11206,7 @@
         <p:spPr>
           <a:xfrm>
             <a:off x="777240" y="5419378"/>
-            <a:ext cx="10637215" cy="827024"/>
+            <a:ext cx="10637215" cy="861568"/>
           </a:xfrm>
           <a:prstGeom prst="rect">
             <a:avLst/>
@@ -11225,9 +11225,9 @@
               </a:lnSpc>
             </a:pPr>
             <a:r>
-              <a:rPr sz="1600" b="0" i="0">
-                <a:solidFill>
-                  <a:srgbClr val="6B7484"/>
+              <a:rPr sz="1700" b="0" i="0">
+                <a:solidFill>
+                  <a:srgbClr val="181D27"/>
                 </a:solidFill>
                 <a:latin typeface="Arial"/>
               </a:rPr>
@@ -11377,9 +11377,9 @@
               </a:lnSpc>
             </a:pPr>
             <a:r>
-              <a:rPr sz="1700" b="0" i="0">
-                <a:solidFill>
-                  <a:srgbClr val="6B7484"/>
+              <a:rPr sz="1800" b="0" i="0">
+                <a:solidFill>
+                  <a:srgbClr val="181D27"/>
                 </a:solidFill>
                 <a:latin typeface="Arial"/>
               </a:rPr>
@@ -11874,7 +11874,7 @@
             <a:r>
               <a:rPr sz="1800" b="0" i="0">
                 <a:solidFill>
-                  <a:srgbClr val="6B7484"/>
+                  <a:srgbClr val="181D27"/>
                 </a:solidFill>
                 <a:latin typeface="Arial"/>
               </a:rPr>
@@ -12030,7 +12030,7 @@
             <a:r>
               <a:rPr sz="2000" b="0" i="0">
                 <a:solidFill>
-                  <a:srgbClr val="6B7484"/>
+                  <a:srgbClr val="181D27"/>
                 </a:solidFill>
                 <a:latin typeface="Arial"/>
               </a:rPr>
@@ -12414,7 +12414,7 @@
             <a:r>
               <a:rPr sz="2000" b="0" i="0">
                 <a:solidFill>
-                  <a:srgbClr val="6B7484"/>
+                  <a:srgbClr val="181D27"/>
                 </a:solidFill>
                 <a:latin typeface="Arial"/>
               </a:rPr>
@@ -12439,8 +12439,8 @@
         </p:blipFill>
         <p:spPr>
           <a:xfrm>
-            <a:off x="1813992" y="2048256"/>
-            <a:ext cx="8563712" cy="3479800"/>
+            <a:off x="1856498" y="2048256"/>
+            <a:ext cx="8478700" cy="3445256"/>
           </a:xfrm>
           <a:prstGeom prst="rect">
             <a:avLst/>
@@ -12455,8 +12455,8 @@
         </p:nvSpPr>
         <p:spPr>
           <a:xfrm>
-            <a:off x="777240" y="5729224"/>
-            <a:ext cx="10637215" cy="827024"/>
+            <a:off x="777240" y="5694680"/>
+            <a:ext cx="10637215" cy="861568"/>
           </a:xfrm>
           <a:prstGeom prst="rect">
             <a:avLst/>
@@ -12475,9 +12475,9 @@
               </a:lnSpc>
             </a:pPr>
             <a:r>
-              <a:rPr sz="1600" b="0" i="0">
-                <a:solidFill>
-                  <a:srgbClr val="6B7484"/>
+              <a:rPr sz="1700" b="0" i="0">
+                <a:solidFill>
+                  <a:srgbClr val="181D27"/>
                 </a:solidFill>
                 <a:latin typeface="Arial"/>
               </a:rPr>
@@ -12722,7 +12722,7 @@
               </a:lnSpc>
             </a:pPr>
             <a:r>
-              <a:rPr sz="1600" b="0" i="0">
+              <a:rPr sz="1700" b="0" i="0">
                 <a:solidFill>
                   <a:srgbClr val="181D27"/>
                 </a:solidFill>
@@ -12757,7 +12757,7 @@
           <a:p>
             <a:pPr algn="l"/>
             <a:r>
-              <a:rPr sz="1600" b="1" i="0">
+              <a:rPr sz="1700" b="1" i="0">
                 <a:solidFill>
                   <a:srgbClr val="2B5CE6"/>
                 </a:solidFill>
@@ -12802,7 +12802,7 @@
               </a:lnSpc>
             </a:pPr>
             <a:r>
-              <a:rPr sz="1600" b="0" i="0">
+              <a:rPr sz="1700" b="0" i="0">
                 <a:solidFill>
                   <a:srgbClr val="181D27"/>
                 </a:solidFill>
@@ -12837,7 +12837,7 @@
           <a:p>
             <a:pPr algn="l"/>
             <a:r>
-              <a:rPr sz="1600" b="1" i="0">
+              <a:rPr sz="1700" b="1" i="0">
                 <a:solidFill>
                   <a:srgbClr val="2B5CE6"/>
                 </a:solidFill>
@@ -12882,7 +12882,7 @@
               </a:lnSpc>
             </a:pPr>
             <a:r>
-              <a:rPr sz="1600" b="0" i="0">
+              <a:rPr sz="1700" b="0" i="0">
                 <a:solidFill>
                   <a:srgbClr val="181D27"/>
                 </a:solidFill>
@@ -12917,7 +12917,7 @@
           <a:p>
             <a:pPr algn="l"/>
             <a:r>
-              <a:rPr sz="1600" b="1" i="0">
+              <a:rPr sz="1700" b="1" i="0">
                 <a:solidFill>
                   <a:srgbClr val="2B5CE6"/>
                 </a:solidFill>
@@ -12962,7 +12962,7 @@
               </a:lnSpc>
             </a:pPr>
             <a:r>
-              <a:rPr sz="1600" b="0" i="0">
+              <a:rPr sz="1700" b="0" i="0">
                 <a:solidFill>
                   <a:srgbClr val="181D27"/>
                 </a:solidFill>
@@ -12997,7 +12997,7 @@
           <a:p>
             <a:pPr algn="l"/>
             <a:r>
-              <a:rPr sz="1600" b="1" i="0">
+              <a:rPr sz="1700" b="1" i="0">
                 <a:solidFill>
                   <a:srgbClr val="2B5CE6"/>
                 </a:solidFill>
@@ -13032,9 +13032,9 @@
           <a:p>
             <a:pPr algn="ctr"/>
             <a:r>
-              <a:rPr sz="1700" b="0" i="1">
-                <a:solidFill>
-                  <a:srgbClr val="6B7484"/>
+              <a:rPr sz="1800" b="0" i="1">
+                <a:solidFill>
+                  <a:srgbClr val="181D27"/>
                 </a:solidFill>
                 <a:latin typeface="Arial"/>
               </a:rPr>
@@ -13236,7 +13236,7 @@
             <a:r>
               <a:rPr sz="1800" b="0" i="0">
                 <a:solidFill>
-                  <a:srgbClr val="6B7484"/>
+                  <a:srgbClr val="181D27"/>
                 </a:solidFill>
                 <a:latin typeface="Arial"/>
               </a:rPr>
@@ -13254,7 +13254,7 @@
         <p:spPr>
           <a:xfrm>
             <a:off x="777240" y="2487168"/>
-            <a:ext cx="10637215" cy="387604"/>
+            <a:ext cx="10637215" cy="384048"/>
           </a:xfrm>
           <a:prstGeom prst="roundRect">
             <a:avLst>
@@ -13298,7 +13298,7 @@
         </p:nvSpPr>
         <p:spPr>
           <a:xfrm>
-            <a:off x="1051560" y="2543810"/>
+            <a:off x="1051560" y="2542032"/>
             <a:ext cx="457200" cy="292608"/>
           </a:xfrm>
           <a:prstGeom prst="rect">
@@ -13333,8 +13333,8 @@
         </p:nvSpPr>
         <p:spPr>
           <a:xfrm>
-            <a:off x="777240" y="2984500"/>
-            <a:ext cx="10637215" cy="387604"/>
+            <a:off x="777240" y="2980944"/>
+            <a:ext cx="10637215" cy="384048"/>
           </a:xfrm>
           <a:prstGeom prst="roundRect">
             <a:avLst>
@@ -13380,7 +13380,7 @@
         </p:nvSpPr>
         <p:spPr>
           <a:xfrm>
-            <a:off x="1051560" y="3041142"/>
+            <a:off x="1051560" y="3035808"/>
             <a:ext cx="457200" cy="292608"/>
           </a:xfrm>
           <a:prstGeom prst="rect">
@@ -13415,7 +13415,7 @@
         </p:nvSpPr>
         <p:spPr>
           <a:xfrm>
-            <a:off x="10317175" y="3059430"/>
+            <a:off x="10317175" y="3054096"/>
             <a:ext cx="822960" cy="274320"/>
           </a:xfrm>
           <a:prstGeom prst="rect">
@@ -13450,8 +13450,8 @@
         </p:nvSpPr>
         <p:spPr>
           <a:xfrm>
-            <a:off x="777240" y="3481832"/>
-            <a:ext cx="10637215" cy="387604"/>
+            <a:off x="777240" y="3474720"/>
+            <a:ext cx="10637215" cy="384048"/>
           </a:xfrm>
           <a:prstGeom prst="roundRect">
             <a:avLst>
@@ -13495,7 +13495,7 @@
         </p:nvSpPr>
         <p:spPr>
           <a:xfrm>
-            <a:off x="1051560" y="3538474"/>
+            <a:off x="1051560" y="3529584"/>
             <a:ext cx="457200" cy="292608"/>
           </a:xfrm>
           <a:prstGeom prst="rect">
@@ -13530,8 +13530,8 @@
         </p:nvSpPr>
         <p:spPr>
           <a:xfrm>
-            <a:off x="777240" y="3979164"/>
-            <a:ext cx="10637215" cy="387604"/>
+            <a:off x="777240" y="3968496"/>
+            <a:ext cx="10637215" cy="384048"/>
           </a:xfrm>
           <a:prstGeom prst="roundRect">
             <a:avLst>
@@ -13575,7 +13575,7 @@
         </p:nvSpPr>
         <p:spPr>
           <a:xfrm>
-            <a:off x="1051560" y="4035806"/>
+            <a:off x="1051560" y="4023360"/>
             <a:ext cx="457200" cy="292608"/>
           </a:xfrm>
           <a:prstGeom prst="rect">
@@ -13610,8 +13610,8 @@
         </p:nvSpPr>
         <p:spPr>
           <a:xfrm>
-            <a:off x="777240" y="4604512"/>
-            <a:ext cx="10637215" cy="1649984"/>
+            <a:off x="777240" y="4590288"/>
+            <a:ext cx="10637215" cy="1664208"/>
           </a:xfrm>
           <a:prstGeom prst="roundRect">
             <a:avLst>
@@ -13636,7 +13636,7 @@
               </a:lnSpc>
             </a:pPr>
             <a:r>
-              <a:rPr sz="1700" b="0" i="0">
+              <a:rPr sz="1800" b="0" i="0">
                 <a:solidFill>
                   <a:srgbClr val="181D27"/>
                 </a:solidFill>
@@ -13862,7 +13862,7 @@
               <a:buChar char="—"/>
             </a:pPr>
             <a:r>
-              <a:rPr sz="1600" b="0" i="0">
+              <a:rPr sz="1700" b="0" i="0">
                 <a:solidFill>
                   <a:srgbClr val="181D27"/>
                 </a:solidFill>
@@ -13886,7 +13886,7 @@
               <a:buChar char="—"/>
             </a:pPr>
             <a:r>
-              <a:rPr sz="1600" b="0" i="0">
+              <a:rPr sz="1700" b="0" i="0">
                 <a:solidFill>
                   <a:srgbClr val="181D27"/>
                 </a:solidFill>
@@ -13910,7 +13910,7 @@
               <a:buChar char="—"/>
             </a:pPr>
             <a:r>
-              <a:rPr sz="1600" b="0" i="0">
+              <a:rPr sz="1700" b="0" i="0">
                 <a:solidFill>
                   <a:srgbClr val="181D27"/>
                 </a:solidFill>
@@ -13934,7 +13934,7 @@
               <a:buChar char="—"/>
             </a:pPr>
             <a:r>
-              <a:rPr sz="1600" b="0" i="0">
+              <a:rPr sz="1700" b="0" i="0">
                 <a:solidFill>
                   <a:srgbClr val="181D27"/>
                 </a:solidFill>
@@ -13943,7 +13943,7 @@
               <a:t>drop="first"</a:t>
             </a:r>
             <a:r>
-              <a:rPr sz="1600" b="0" i="0">
+              <a:rPr sz="1700" b="0" i="0">
                 <a:solidFill>
                   <a:srgbClr val="181D27"/>
                 </a:solidFill>
@@ -14012,7 +14012,7 @@
               <a:buChar char="—"/>
             </a:pPr>
             <a:r>
-              <a:rPr sz="1600" b="0" i="0">
+              <a:rPr sz="1700" b="0" i="0">
                 <a:solidFill>
                   <a:srgbClr val="181D27"/>
                 </a:solidFill>
@@ -14036,7 +14036,7 @@
               <a:buChar char="—"/>
             </a:pPr>
             <a:r>
-              <a:rPr sz="1600" b="0" i="0">
+              <a:rPr sz="1700" b="0" i="0">
                 <a:solidFill>
                   <a:srgbClr val="181D27"/>
                 </a:solidFill>
@@ -14060,7 +14060,7 @@
               <a:buChar char="—"/>
             </a:pPr>
             <a:r>
-              <a:rPr sz="1600" b="0" i="0">
+              <a:rPr sz="1700" b="0" i="0">
                 <a:solidFill>
                   <a:srgbClr val="181D27"/>
                 </a:solidFill>
@@ -14084,7 +14084,7 @@
               <a:buChar char="—"/>
             </a:pPr>
             <a:r>
-              <a:rPr sz="1600" b="0" i="0">
+              <a:rPr sz="1700" b="0" i="0">
                 <a:solidFill>
                   <a:srgbClr val="181D27"/>
                 </a:solidFill>
@@ -14399,7 +14399,7 @@
             <a:r>
               <a:rPr sz="1800" b="0" i="0">
                 <a:solidFill>
-                  <a:srgbClr val="6B7484"/>
+                  <a:srgbClr val="181D27"/>
                 </a:solidFill>
                 <a:latin typeface="Arial"/>
               </a:rPr>
@@ -14555,7 +14555,7 @@
             <a:r>
               <a:rPr sz="2000" b="0" i="0">
                 <a:solidFill>
-                  <a:srgbClr val="6B7484"/>
+                  <a:srgbClr val="181D27"/>
                 </a:solidFill>
                 <a:latin typeface="Arial"/>
               </a:rPr>
@@ -14738,9 +14738,9 @@
               <a:buChar char="·"/>
             </a:pPr>
             <a:r>
-              <a:rPr sz="1600" b="0" i="0">
-                <a:solidFill>
-                  <a:srgbClr val="6B7484"/>
+              <a:rPr sz="1700" b="0" i="0">
+                <a:solidFill>
+                  <a:srgbClr val="181D27"/>
                 </a:solidFill>
                 <a:latin typeface="Arial"/>
               </a:rPr>
@@ -14936,7 +14936,7 @@
             <a:r>
               <a:rPr sz="2000" b="0" i="0">
                 <a:solidFill>
-                  <a:srgbClr val="6B7484"/>
+                  <a:srgbClr val="181D27"/>
                 </a:solidFill>
                 <a:latin typeface="Arial"/>
               </a:rPr>
@@ -14982,7 +14982,7 @@
                       <a:r>
                         <a:rPr sz="1500" b="1" i="0">
                           <a:solidFill>
-                            <a:srgbClr val="6B7484"/>
+                            <a:srgbClr val="181D27"/>
                           </a:solidFill>
                           <a:latin typeface="Arial"/>
                         </a:rPr>
@@ -15018,7 +15018,7 @@
                       <a:r>
                         <a:rPr sz="1500" b="1" i="0">
                           <a:solidFill>
-                            <a:srgbClr val="6B7484"/>
+                            <a:srgbClr val="181D27"/>
                           </a:solidFill>
                           <a:latin typeface="Arial"/>
                         </a:rPr>
@@ -15054,7 +15054,7 @@
                       <a:r>
                         <a:rPr sz="1500" b="1" i="0">
                           <a:solidFill>
-                            <a:srgbClr val="6B7484"/>
+                            <a:srgbClr val="181D27"/>
                           </a:solidFill>
                           <a:latin typeface="Arial"/>
                         </a:rPr>
@@ -15868,7 +15868,7 @@
               </a:lnSpc>
             </a:pPr>
             <a:r>
-              <a:rPr sz="1600" b="0" i="0">
+              <a:rPr sz="1700" b="0" i="0">
                 <a:solidFill>
                   <a:srgbClr val="181D27"/>
                 </a:solidFill>
@@ -15903,7 +15903,7 @@
           <a:p>
             <a:pPr algn="l"/>
             <a:r>
-              <a:rPr sz="1600" b="1" i="0">
+              <a:rPr sz="1700" b="1" i="0">
                 <a:solidFill>
                   <a:srgbClr val="2B5CE6"/>
                 </a:solidFill>
@@ -15948,7 +15948,7 @@
               </a:lnSpc>
             </a:pPr>
             <a:r>
-              <a:rPr sz="1600" b="0" i="0">
+              <a:rPr sz="1700" b="0" i="0">
                 <a:solidFill>
                   <a:srgbClr val="181D27"/>
                 </a:solidFill>
@@ -15983,7 +15983,7 @@
           <a:p>
             <a:pPr algn="l"/>
             <a:r>
-              <a:rPr sz="1600" b="1" i="0">
+              <a:rPr sz="1700" b="1" i="0">
                 <a:solidFill>
                   <a:srgbClr val="2B5CE6"/>
                 </a:solidFill>
@@ -16028,7 +16028,7 @@
               </a:lnSpc>
             </a:pPr>
             <a:r>
-              <a:rPr sz="1600" b="0" i="0">
+              <a:rPr sz="1700" b="0" i="0">
                 <a:solidFill>
                   <a:srgbClr val="181D27"/>
                 </a:solidFill>
@@ -16063,7 +16063,7 @@
           <a:p>
             <a:pPr algn="l"/>
             <a:r>
-              <a:rPr sz="1600" b="1" i="0">
+              <a:rPr sz="1700" b="1" i="0">
                 <a:solidFill>
                   <a:srgbClr val="2B5CE6"/>
                 </a:solidFill>
@@ -16108,7 +16108,7 @@
               </a:lnSpc>
             </a:pPr>
             <a:r>
-              <a:rPr sz="1600" b="0" i="0">
+              <a:rPr sz="1700" b="0" i="0">
                 <a:solidFill>
                   <a:srgbClr val="181D27"/>
                 </a:solidFill>
@@ -16143,7 +16143,7 @@
           <a:p>
             <a:pPr algn="l"/>
             <a:r>
-              <a:rPr sz="1600" b="1" i="0">
+              <a:rPr sz="1700" b="1" i="0">
                 <a:solidFill>
                   <a:srgbClr val="2B5CE6"/>
                 </a:solidFill>
@@ -16178,9 +16178,9 @@
           <a:p>
             <a:pPr algn="ctr"/>
             <a:r>
-              <a:rPr sz="1700" b="0" i="1">
-                <a:solidFill>
-                  <a:srgbClr val="6B7484"/>
+              <a:rPr sz="1800" b="0" i="1">
+                <a:solidFill>
+                  <a:srgbClr val="181D27"/>
                 </a:solidFill>
                 <a:latin typeface="Arial"/>
               </a:rPr>
@@ -16382,7 +16382,7 @@
             <a:r>
               <a:rPr sz="1800" b="0" i="0">
                 <a:solidFill>
-                  <a:srgbClr val="6B7484"/>
+                  <a:srgbClr val="181D27"/>
                 </a:solidFill>
                 <a:latin typeface="Arial"/>
               </a:rPr>
@@ -16400,7 +16400,7 @@
         <p:spPr>
           <a:xfrm>
             <a:off x="777240" y="2487168"/>
-            <a:ext cx="10637215" cy="387604"/>
+            <a:ext cx="10637215" cy="384048"/>
           </a:xfrm>
           <a:prstGeom prst="roundRect">
             <a:avLst>
@@ -16444,7 +16444,7 @@
         </p:nvSpPr>
         <p:spPr>
           <a:xfrm>
-            <a:off x="1051560" y="2543810"/>
+            <a:off x="1051560" y="2542032"/>
             <a:ext cx="457200" cy="292608"/>
           </a:xfrm>
           <a:prstGeom prst="rect">
@@ -16479,8 +16479,8 @@
         </p:nvSpPr>
         <p:spPr>
           <a:xfrm>
-            <a:off x="777240" y="2984500"/>
-            <a:ext cx="10637215" cy="387604"/>
+            <a:off x="777240" y="2980944"/>
+            <a:ext cx="10637215" cy="384048"/>
           </a:xfrm>
           <a:prstGeom prst="roundRect">
             <a:avLst>
@@ -16524,7 +16524,7 @@
         </p:nvSpPr>
         <p:spPr>
           <a:xfrm>
-            <a:off x="1051560" y="3041142"/>
+            <a:off x="1051560" y="3035808"/>
             <a:ext cx="457200" cy="292608"/>
           </a:xfrm>
           <a:prstGeom prst="rect">
@@ -16559,8 +16559,8 @@
         </p:nvSpPr>
         <p:spPr>
           <a:xfrm>
-            <a:off x="777240" y="3481832"/>
-            <a:ext cx="10637215" cy="387604"/>
+            <a:off x="777240" y="3474720"/>
+            <a:ext cx="10637215" cy="384048"/>
           </a:xfrm>
           <a:prstGeom prst="roundRect">
             <a:avLst>
@@ -16606,7 +16606,7 @@
         </p:nvSpPr>
         <p:spPr>
           <a:xfrm>
-            <a:off x="1051560" y="3538474"/>
+            <a:off x="1051560" y="3529584"/>
             <a:ext cx="457200" cy="292608"/>
           </a:xfrm>
           <a:prstGeom prst="rect">
@@ -16641,7 +16641,7 @@
         </p:nvSpPr>
         <p:spPr>
           <a:xfrm>
-            <a:off x="10317175" y="3556762"/>
+            <a:off x="10317175" y="3547872"/>
             <a:ext cx="822960" cy="274320"/>
           </a:xfrm>
           <a:prstGeom prst="rect">
@@ -16676,8 +16676,8 @@
         </p:nvSpPr>
         <p:spPr>
           <a:xfrm>
-            <a:off x="777240" y="3979164"/>
-            <a:ext cx="10637215" cy="387604"/>
+            <a:off x="777240" y="3968496"/>
+            <a:ext cx="10637215" cy="384048"/>
           </a:xfrm>
           <a:prstGeom prst="roundRect">
             <a:avLst>
@@ -16721,7 +16721,7 @@
         </p:nvSpPr>
         <p:spPr>
           <a:xfrm>
-            <a:off x="1051560" y="4035806"/>
+            <a:off x="1051560" y="4023360"/>
             <a:ext cx="457200" cy="292608"/>
           </a:xfrm>
           <a:prstGeom prst="rect">
@@ -16756,8 +16756,8 @@
         </p:nvSpPr>
         <p:spPr>
           <a:xfrm>
-            <a:off x="777240" y="4604512"/>
-            <a:ext cx="10637215" cy="1649984"/>
+            <a:off x="777240" y="4590288"/>
+            <a:ext cx="10637215" cy="1664208"/>
           </a:xfrm>
           <a:prstGeom prst="roundRect">
             <a:avLst>
@@ -16782,7 +16782,7 @@
               </a:lnSpc>
             </a:pPr>
             <a:r>
-              <a:rPr sz="1700" b="0" i="0">
+              <a:rPr sz="1800" b="0" i="0">
                 <a:solidFill>
                   <a:srgbClr val="181D27"/>
                 </a:solidFill>
@@ -17021,7 +17021,7 @@
               <a:buChar char="—"/>
             </a:pPr>
             <a:r>
-              <a:rPr sz="1600" b="0" i="0">
+              <a:rPr sz="1700" b="0" i="0">
                 <a:solidFill>
                   <a:srgbClr val="181D27"/>
                 </a:solidFill>
@@ -17045,7 +17045,7 @@
               <a:buChar char="—"/>
             </a:pPr>
             <a:r>
-              <a:rPr sz="1600" b="0" i="0">
+              <a:rPr sz="1700" b="0" i="0">
                 <a:solidFill>
                   <a:srgbClr val="181D27"/>
                 </a:solidFill>
@@ -17069,7 +17069,7 @@
               <a:buChar char="—"/>
             </a:pPr>
             <a:r>
-              <a:rPr sz="1600" b="0" i="0">
+              <a:rPr sz="1700" b="0" i="0">
                 <a:solidFill>
                   <a:srgbClr val="181D27"/>
                 </a:solidFill>
@@ -17093,7 +17093,7 @@
               <a:buChar char="—"/>
             </a:pPr>
             <a:r>
-              <a:rPr sz="1600" b="0" i="0">
+              <a:rPr sz="1700" b="0" i="0">
                 <a:solidFill>
                   <a:srgbClr val="181D27"/>
                 </a:solidFill>
@@ -17117,7 +17117,7 @@
               <a:buChar char="—"/>
             </a:pPr>
             <a:r>
-              <a:rPr sz="1600" b="0" i="0">
+              <a:rPr sz="1700" b="0" i="0">
                 <a:solidFill>
                   <a:srgbClr val="181D27"/>
                 </a:solidFill>
@@ -17199,7 +17199,7 @@
               <a:buChar char="—"/>
             </a:pPr>
             <a:r>
-              <a:rPr sz="1600" b="0" i="0">
+              <a:rPr sz="1700" b="0" i="0">
                 <a:solidFill>
                   <a:srgbClr val="181D27"/>
                 </a:solidFill>
@@ -17223,7 +17223,7 @@
               <a:buChar char="—"/>
             </a:pPr>
             <a:r>
-              <a:rPr sz="1600" b="0" i="0">
+              <a:rPr sz="1700" b="0" i="0">
                 <a:solidFill>
                   <a:srgbClr val="181D27"/>
                 </a:solidFill>
@@ -17247,7 +17247,7 @@
               <a:buChar char="—"/>
             </a:pPr>
             <a:r>
-              <a:rPr sz="1600" b="0" i="0">
+              <a:rPr sz="1700" b="0" i="0">
                 <a:solidFill>
                   <a:srgbClr val="181D27"/>
                 </a:solidFill>
@@ -17271,7 +17271,7 @@
               <a:buChar char="—"/>
             </a:pPr>
             <a:r>
-              <a:rPr sz="1600" b="0" i="0">
+              <a:rPr sz="1700" b="0" i="0">
                 <a:solidFill>
                   <a:srgbClr val="181D27"/>
                 </a:solidFill>
@@ -17469,7 +17469,7 @@
             <a:r>
               <a:rPr sz="2000" b="0" i="0">
                 <a:solidFill>
-                  <a:srgbClr val="6B7484"/>
+                  <a:srgbClr val="181D27"/>
                 </a:solidFill>
                 <a:latin typeface="Arial"/>
               </a:rPr>
@@ -17886,7 +17886,7 @@
             <a:r>
               <a:rPr sz="2000" b="0" i="0">
                 <a:solidFill>
-                  <a:srgbClr val="6B7484"/>
+                  <a:srgbClr val="181D27"/>
                 </a:solidFill>
                 <a:latin typeface="Arial"/>
               </a:rPr>
@@ -18096,9 +18096,9 @@
               <a:buChar char="·"/>
             </a:pPr>
             <a:r>
-              <a:rPr sz="1600" b="0" i="0">
-                <a:solidFill>
-                  <a:srgbClr val="6B7484"/>
+              <a:rPr sz="1700" b="0" i="0">
+                <a:solidFill>
+                  <a:srgbClr val="181D27"/>
                 </a:solidFill>
                 <a:latin typeface="Arial"/>
               </a:rPr>
@@ -18294,7 +18294,7 @@
             <a:r>
               <a:rPr sz="2000" b="0" i="0">
                 <a:solidFill>
-                  <a:srgbClr val="6B7484"/>
+                  <a:srgbClr val="181D27"/>
                 </a:solidFill>
                 <a:latin typeface="Arial"/>
               </a:rPr>
@@ -18488,9 +18488,9 @@
               </a:lnSpc>
             </a:pPr>
             <a:r>
-              <a:rPr sz="1600" b="0" i="0">
-                <a:solidFill>
-                  <a:srgbClr val="6B7484"/>
+              <a:rPr sz="1700" b="0" i="0">
+                <a:solidFill>
+                  <a:srgbClr val="181D27"/>
                 </a:solidFill>
                 <a:latin typeface="Arial"/>
               </a:rPr>
@@ -18672,8 +18672,8 @@
         </p:blipFill>
         <p:spPr>
           <a:xfrm>
-            <a:off x="994590" y="1572768"/>
-            <a:ext cx="10202516" cy="3955288"/>
+            <a:off x="1039142" y="1572768"/>
+            <a:ext cx="10113411" cy="3920744"/>
           </a:xfrm>
           <a:prstGeom prst="rect">
             <a:avLst/>
@@ -18688,8 +18688,8 @@
         </p:nvSpPr>
         <p:spPr>
           <a:xfrm>
-            <a:off x="777240" y="5729224"/>
-            <a:ext cx="10637215" cy="827024"/>
+            <a:off x="777240" y="5694680"/>
+            <a:ext cx="10637215" cy="861568"/>
           </a:xfrm>
           <a:prstGeom prst="rect">
             <a:avLst/>
@@ -18708,9 +18708,9 @@
               </a:lnSpc>
             </a:pPr>
             <a:r>
-              <a:rPr sz="1600" b="0" i="0">
-                <a:solidFill>
-                  <a:srgbClr val="6B7484"/>
+              <a:rPr sz="1700" b="0" i="0">
+                <a:solidFill>
+                  <a:srgbClr val="181D27"/>
                 </a:solidFill>
                 <a:latin typeface="Arial"/>
               </a:rPr>
@@ -18906,7 +18906,7 @@
             <a:r>
               <a:rPr sz="2000" b="0" i="0">
                 <a:solidFill>
-                  <a:srgbClr val="6B7484"/>
+                  <a:srgbClr val="181D27"/>
                 </a:solidFill>
                 <a:latin typeface="Arial"/>
               </a:rPr>
@@ -19125,9 +19125,9 @@
               <a:buChar char="·"/>
             </a:pPr>
             <a:r>
-              <a:rPr sz="1600" b="0" i="0">
-                <a:solidFill>
-                  <a:srgbClr val="6B7484"/>
+              <a:rPr sz="1700" b="0" i="0">
+                <a:solidFill>
+                  <a:srgbClr val="181D27"/>
                 </a:solidFill>
                 <a:latin typeface="Arial"/>
               </a:rPr>
@@ -19323,7 +19323,7 @@
             <a:r>
               <a:rPr sz="2000" b="0" i="0">
                 <a:solidFill>
-                  <a:srgbClr val="6B7484"/>
+                  <a:srgbClr val="181D27"/>
                 </a:solidFill>
                 <a:latin typeface="Arial"/>
               </a:rPr>
@@ -19700,7 +19700,7 @@
             <a:r>
               <a:rPr sz="1800" b="0" i="0">
                 <a:solidFill>
-                  <a:srgbClr val="6B7484"/>
+                  <a:srgbClr val="181D27"/>
                 </a:solidFill>
                 <a:latin typeface="Arial"/>
               </a:rPr>
@@ -19905,7 +19905,7 @@
               </a:lnSpc>
             </a:pPr>
             <a:r>
-              <a:rPr sz="1600" b="0" i="0">
+              <a:rPr sz="1700" b="0" i="0">
                 <a:solidFill>
                   <a:srgbClr val="181D27"/>
                 </a:solidFill>
@@ -19940,7 +19940,7 @@
           <a:p>
             <a:pPr algn="l"/>
             <a:r>
-              <a:rPr sz="1600" b="1" i="0">
+              <a:rPr sz="1700" b="1" i="0">
                 <a:solidFill>
                   <a:srgbClr val="2B5CE6"/>
                 </a:solidFill>
@@ -19985,7 +19985,7 @@
               </a:lnSpc>
             </a:pPr>
             <a:r>
-              <a:rPr sz="1600" b="0" i="0">
+              <a:rPr sz="1700" b="0" i="0">
                 <a:solidFill>
                   <a:srgbClr val="181D27"/>
                 </a:solidFill>
@@ -20020,7 +20020,7 @@
           <a:p>
             <a:pPr algn="l"/>
             <a:r>
-              <a:rPr sz="1600" b="1" i="0">
+              <a:rPr sz="1700" b="1" i="0">
                 <a:solidFill>
                   <a:srgbClr val="2B5CE6"/>
                 </a:solidFill>
@@ -20065,7 +20065,7 @@
               </a:lnSpc>
             </a:pPr>
             <a:r>
-              <a:rPr sz="1600" b="0" i="0">
+              <a:rPr sz="1700" b="0" i="0">
                 <a:solidFill>
                   <a:srgbClr val="181D27"/>
                 </a:solidFill>
@@ -20100,7 +20100,7 @@
           <a:p>
             <a:pPr algn="l"/>
             <a:r>
-              <a:rPr sz="1600" b="1" i="0">
+              <a:rPr sz="1700" b="1" i="0">
                 <a:solidFill>
                   <a:srgbClr val="2B5CE6"/>
                 </a:solidFill>
@@ -20145,7 +20145,7 @@
               </a:lnSpc>
             </a:pPr>
             <a:r>
-              <a:rPr sz="1600" b="0" i="0">
+              <a:rPr sz="1700" b="0" i="0">
                 <a:solidFill>
                   <a:srgbClr val="181D27"/>
                 </a:solidFill>
@@ -20180,7 +20180,7 @@
           <a:p>
             <a:pPr algn="l"/>
             <a:r>
-              <a:rPr sz="1600" b="1" i="0">
+              <a:rPr sz="1700" b="1" i="0">
                 <a:solidFill>
                   <a:srgbClr val="2B5CE6"/>
                 </a:solidFill>
@@ -20215,9 +20215,9 @@
           <a:p>
             <a:pPr algn="ctr"/>
             <a:r>
-              <a:rPr sz="1700" b="0" i="1">
-                <a:solidFill>
-                  <a:srgbClr val="6B7484"/>
+              <a:rPr sz="1800" b="0" i="1">
+                <a:solidFill>
+                  <a:srgbClr val="181D27"/>
                 </a:solidFill>
                 <a:latin typeface="Arial"/>
               </a:rPr>
@@ -20419,7 +20419,7 @@
             <a:r>
               <a:rPr sz="1800" b="0" i="0">
                 <a:solidFill>
-                  <a:srgbClr val="6B7484"/>
+                  <a:srgbClr val="181D27"/>
                 </a:solidFill>
                 <a:latin typeface="Arial"/>
               </a:rPr>
@@ -20819,7 +20819,7 @@
               </a:lnSpc>
             </a:pPr>
             <a:r>
-              <a:rPr sz="1700" b="0" i="0">
+              <a:rPr sz="1800" b="0" i="0">
                 <a:solidFill>
                   <a:srgbClr val="181D27"/>
                 </a:solidFill>
@@ -21045,7 +21045,7 @@
               <a:buChar char="—"/>
             </a:pPr>
             <a:r>
-              <a:rPr sz="1600" b="0" i="0">
+              <a:rPr sz="1700" b="0" i="0">
                 <a:solidFill>
                   <a:srgbClr val="181D27"/>
                 </a:solidFill>
@@ -21069,7 +21069,7 @@
               <a:buChar char="—"/>
             </a:pPr>
             <a:r>
-              <a:rPr sz="1600" b="0" i="0">
+              <a:rPr sz="1700" b="0" i="0">
                 <a:solidFill>
                   <a:srgbClr val="181D27"/>
                 </a:solidFill>
@@ -21093,7 +21093,7 @@
               <a:buChar char="—"/>
             </a:pPr>
             <a:r>
-              <a:rPr sz="1600" b="0" i="0">
+              <a:rPr sz="1700" b="0" i="0">
                 <a:solidFill>
                   <a:srgbClr val="181D27"/>
                 </a:solidFill>
@@ -21117,7 +21117,7 @@
               <a:buChar char="—"/>
             </a:pPr>
             <a:r>
-              <a:rPr sz="1600" b="1" i="0">
+              <a:rPr sz="1700" b="1" i="0">
                 <a:solidFill>
                   <a:srgbClr val="181D27"/>
                 </a:solidFill>
@@ -21126,7 +21126,7 @@
               <a:t>Результат:</a:t>
             </a:r>
             <a:r>
-              <a:rPr sz="1600" b="0" i="0">
+              <a:rPr sz="1700" b="0" i="0">
                 <a:solidFill>
                   <a:srgbClr val="181D27"/>
                 </a:solidFill>
@@ -21150,7 +21150,7 @@
               <a:buChar char="—"/>
             </a:pPr>
             <a:r>
-              <a:rPr sz="1600" b="0" i="0">
+              <a:rPr sz="1700" b="0" i="0">
                 <a:solidFill>
                   <a:srgbClr val="181D27"/>
                 </a:solidFill>
@@ -21219,7 +21219,7 @@
               <a:buChar char="—"/>
             </a:pPr>
             <a:r>
-              <a:rPr sz="1600" b="0" i="0">
+              <a:rPr sz="1700" b="0" i="0">
                 <a:solidFill>
                   <a:srgbClr val="181D27"/>
                 </a:solidFill>
@@ -21243,7 +21243,7 @@
               <a:buChar char="—"/>
             </a:pPr>
             <a:r>
-              <a:rPr sz="1600" b="0" i="0">
+              <a:rPr sz="1700" b="0" i="0">
                 <a:solidFill>
                   <a:srgbClr val="181D27"/>
                 </a:solidFill>
@@ -21267,7 +21267,7 @@
               <a:buChar char="—"/>
             </a:pPr>
             <a:r>
-              <a:rPr sz="1600" b="0" i="0">
+              <a:rPr sz="1700" b="0" i="0">
                 <a:solidFill>
                   <a:srgbClr val="181D27"/>
                 </a:solidFill>
@@ -21291,7 +21291,7 @@
               <a:buChar char="—"/>
             </a:pPr>
             <a:r>
-              <a:rPr sz="1600" b="1" i="0">
+              <a:rPr sz="1700" b="1" i="0">
                 <a:solidFill>
                   <a:srgbClr val="181D27"/>
                 </a:solidFill>
@@ -21300,7 +21300,7 @@
               <a:t>Результат:</a:t>
             </a:r>
             <a:r>
-              <a:rPr sz="1600" b="0" i="0">
+              <a:rPr sz="1700" b="0" i="0">
                 <a:solidFill>
                   <a:srgbClr val="181D27"/>
                 </a:solidFill>
@@ -21324,7 +21324,7 @@
               <a:buChar char="—"/>
             </a:pPr>
             <a:r>
-              <a:rPr sz="1600" b="0" i="0">
+              <a:rPr sz="1700" b="0" i="0">
                 <a:solidFill>
                   <a:srgbClr val="181D27"/>
                 </a:solidFill>
@@ -21525,7 +21525,7 @@
         <p:spPr>
           <a:xfrm>
             <a:off x="777240" y="5235905"/>
-            <a:ext cx="10637215" cy="827024"/>
+            <a:ext cx="10637215" cy="861568"/>
           </a:xfrm>
           <a:prstGeom prst="rect">
             <a:avLst/>
@@ -21544,9 +21544,9 @@
               </a:lnSpc>
             </a:pPr>
             <a:r>
-              <a:rPr sz="1600" b="0" i="0">
-                <a:solidFill>
-                  <a:srgbClr val="6B7484"/>
+              <a:rPr sz="1700" b="0" i="0">
+                <a:solidFill>
+                  <a:srgbClr val="181D27"/>
                 </a:solidFill>
                 <a:latin typeface="Arial"/>
               </a:rPr>
@@ -22216,7 +22216,7 @@
             <a:r>
               <a:rPr sz="2000" b="0" i="0">
                 <a:solidFill>
-                  <a:srgbClr val="6B7484"/>
+                  <a:srgbClr val="181D27"/>
                 </a:solidFill>
                 <a:latin typeface="Arial"/>
               </a:rPr>
@@ -22458,9 +22458,9 @@
               </a:lnSpc>
             </a:pPr>
             <a:r>
-              <a:rPr sz="1600" b="0" i="0">
-                <a:solidFill>
-                  <a:srgbClr val="6B7484"/>
+              <a:rPr sz="1700" b="0" i="0">
+                <a:solidFill>
+                  <a:srgbClr val="181D27"/>
                 </a:solidFill>
                 <a:latin typeface="Arial"/>
               </a:rPr>
@@ -23194,7 +23194,7 @@
               <a:buChar char="—"/>
             </a:pPr>
             <a:r>
-              <a:rPr sz="1600" b="0" i="0">
+              <a:rPr sz="1700" b="0" i="0">
                 <a:solidFill>
                   <a:srgbClr val="181D27"/>
                 </a:solidFill>
@@ -23218,7 +23218,7 @@
               <a:buChar char="—"/>
             </a:pPr>
             <a:r>
-              <a:rPr sz="1600" b="0" i="0">
+              <a:rPr sz="1700" b="0" i="0">
                 <a:solidFill>
                   <a:srgbClr val="181D27"/>
                 </a:solidFill>
@@ -23227,7 +23227,7 @@
               <a:t>После практики выдаётся </a:t>
             </a:r>
             <a:r>
-              <a:rPr sz="1600" b="1" i="0">
+              <a:rPr sz="1700" b="1" i="0">
                 <a:solidFill>
                   <a:srgbClr val="181D27"/>
                 </a:solidFill>
@@ -23236,7 +23236,7 @@
               <a:t>домашняя работа 1</a:t>
             </a:r>
             <a:r>
-              <a:rPr sz="1600" b="0" i="0">
+              <a:rPr sz="1700" b="0" i="0">
                 <a:solidFill>
                   <a:srgbClr val="181D27"/>
                 </a:solidFill>
@@ -23260,7 +23260,7 @@
               <a:buChar char="—"/>
             </a:pPr>
             <a:r>
-              <a:rPr sz="1600" b="0" i="0">
+              <a:rPr sz="1700" b="0" i="0">
                 <a:solidFill>
                   <a:srgbClr val="181D27"/>
                 </a:solidFill>
@@ -23342,7 +23342,7 @@
               <a:buChar char="—"/>
             </a:pPr>
             <a:r>
-              <a:rPr sz="1600" b="0" i="0">
+              <a:rPr sz="1700" b="0" i="0">
                 <a:solidFill>
                   <a:srgbClr val="181D27"/>
                 </a:solidFill>
@@ -23366,7 +23366,7 @@
               <a:buChar char="—"/>
             </a:pPr>
             <a:r>
-              <a:rPr sz="1600" b="0" i="0">
+              <a:rPr sz="1700" b="0" i="0">
                 <a:solidFill>
                   <a:srgbClr val="181D27"/>
                 </a:solidFill>
@@ -23390,7 +23390,7 @@
               <a:buChar char="—"/>
             </a:pPr>
             <a:r>
-              <a:rPr sz="1600" b="0" i="0">
+              <a:rPr sz="1700" b="0" i="0">
                 <a:solidFill>
                   <a:srgbClr val="181D27"/>
                 </a:solidFill>
@@ -23721,7 +23721,7 @@
             <a:r>
               <a:rPr sz="1400" b="0" i="0">
                 <a:solidFill>
-                  <a:srgbClr val="6B7484"/>
+                  <a:srgbClr val="181D27"/>
                 </a:solidFill>
                 <a:latin typeface="Arial"/>
               </a:rPr>
@@ -23737,7 +23737,7 @@
             <a:r>
               <a:rPr sz="1400" b="0" i="0">
                 <a:solidFill>
-                  <a:srgbClr val="6B7484"/>
+                  <a:srgbClr val="181D27"/>
                 </a:solidFill>
                 <a:latin typeface="Arial"/>
               </a:rPr>
@@ -23830,7 +23830,7 @@
             <a:r>
               <a:rPr sz="1400" b="0" i="0">
                 <a:solidFill>
-                  <a:srgbClr val="6B7484"/>
+                  <a:srgbClr val="181D27"/>
                 </a:solidFill>
                 <a:latin typeface="Arial"/>
               </a:rPr>
@@ -23846,7 +23846,7 @@
             <a:r>
               <a:rPr sz="1400" b="0" i="0">
                 <a:solidFill>
-                  <a:srgbClr val="6B7484"/>
+                  <a:srgbClr val="181D27"/>
                 </a:solidFill>
                 <a:latin typeface="Arial"/>
               </a:rPr>
@@ -23939,7 +23939,7 @@
             <a:r>
               <a:rPr sz="1400" b="0" i="0">
                 <a:solidFill>
-                  <a:srgbClr val="6B7484"/>
+                  <a:srgbClr val="181D27"/>
                 </a:solidFill>
                 <a:latin typeface="Arial"/>
               </a:rPr>
@@ -23955,7 +23955,7 @@
             <a:r>
               <a:rPr sz="1400" b="0" i="0">
                 <a:solidFill>
-                  <a:srgbClr val="6B7484"/>
+                  <a:srgbClr val="181D27"/>
                 </a:solidFill>
                 <a:latin typeface="Arial"/>
               </a:rPr>
@@ -24048,7 +24048,7 @@
             <a:r>
               <a:rPr sz="1400" b="0" i="0">
                 <a:solidFill>
-                  <a:srgbClr val="6B7484"/>
+                  <a:srgbClr val="181D27"/>
                 </a:solidFill>
                 <a:latin typeface="Arial"/>
               </a:rPr>
@@ -24064,7 +24064,7 @@
             <a:r>
               <a:rPr sz="1400" b="0" i="0">
                 <a:solidFill>
-                  <a:srgbClr val="6B7484"/>
+                  <a:srgbClr val="181D27"/>
                 </a:solidFill>
                 <a:latin typeface="Arial"/>
               </a:rPr>
@@ -24101,9 +24101,9 @@
               </a:lnSpc>
             </a:pPr>
             <a:r>
-              <a:rPr sz="1600" b="0" i="0">
-                <a:solidFill>
-                  <a:srgbClr val="6B7484"/>
+              <a:rPr sz="1500" b="0" i="0">
+                <a:solidFill>
+                  <a:srgbClr val="181D27"/>
                 </a:solidFill>
                 <a:latin typeface="Arial"/>
               </a:rPr>
@@ -24299,7 +24299,7 @@
             <a:r>
               <a:rPr sz="2000" b="0" i="0">
                 <a:solidFill>
-                  <a:srgbClr val="6B7484"/>
+                  <a:srgbClr val="181D27"/>
                 </a:solidFill>
                 <a:latin typeface="Arial"/>
               </a:rPr>
@@ -24445,9 +24445,9 @@
               </a:lnSpc>
             </a:pPr>
             <a:r>
-              <a:rPr sz="1600" b="0" i="0">
-                <a:solidFill>
-                  <a:srgbClr val="6B7484"/>
+              <a:rPr sz="1700" b="0" i="0">
+                <a:solidFill>
+                  <a:srgbClr val="181D27"/>
                 </a:solidFill>
                 <a:latin typeface="Arial"/>
               </a:rPr>
@@ -24684,7 +24684,7 @@
               <a:buChar char="—"/>
             </a:pPr>
             <a:r>
-              <a:rPr sz="1600" b="1" i="0">
+              <a:rPr sz="1700" b="1" i="0">
                 <a:solidFill>
                   <a:srgbClr val="181D27"/>
                 </a:solidFill>
@@ -24693,7 +24693,7 @@
               <a:t>Гистограмма</a:t>
             </a:r>
             <a:r>
-              <a:rPr sz="1600" b="0" i="0">
+              <a:rPr sz="1700" b="0" i="0">
                 <a:solidFill>
                   <a:srgbClr val="181D27"/>
                 </a:solidFill>
@@ -24717,7 +24717,7 @@
               <a:buChar char="—"/>
             </a:pPr>
             <a:r>
-              <a:rPr sz="1600" b="1" i="0">
+              <a:rPr sz="1700" b="1" i="0">
                 <a:solidFill>
                   <a:srgbClr val="181D27"/>
                 </a:solidFill>
@@ -24726,7 +24726,7 @@
               <a:t>Boxplot</a:t>
             </a:r>
             <a:r>
-              <a:rPr sz="1600" b="0" i="0">
+              <a:rPr sz="1700" b="0" i="0">
                 <a:solidFill>
                   <a:srgbClr val="181D27"/>
                 </a:solidFill>
@@ -24750,7 +24750,7 @@
               <a:buChar char="—"/>
             </a:pPr>
             <a:r>
-              <a:rPr sz="1600" b="0" i="0">
+              <a:rPr sz="1700" b="0" i="0">
                 <a:solidFill>
                   <a:srgbClr val="181D27"/>
                 </a:solidFill>
@@ -24774,7 +24774,7 @@
               <a:buChar char="—"/>
             </a:pPr>
             <a:r>
-              <a:rPr sz="1600" b="0" i="0">
+              <a:rPr sz="1700" b="0" i="0">
                 <a:solidFill>
                   <a:srgbClr val="181D27"/>
                 </a:solidFill>
@@ -24856,7 +24856,7 @@
               <a:buChar char="—"/>
             </a:pPr>
             <a:r>
-              <a:rPr sz="1600" b="1" i="0">
+              <a:rPr sz="1700" b="1" i="0">
                 <a:solidFill>
                   <a:srgbClr val="181D27"/>
                 </a:solidFill>
@@ -24865,7 +24865,7 @@
               <a:t>Countplot</a:t>
             </a:r>
             <a:r>
-              <a:rPr sz="1600" b="0" i="0">
+              <a:rPr sz="1700" b="0" i="0">
                 <a:solidFill>
                   <a:srgbClr val="181D27"/>
                 </a:solidFill>
@@ -24889,7 +24889,7 @@
               <a:buChar char="—"/>
             </a:pPr>
             <a:r>
-              <a:rPr sz="1600" b="0" i="0">
+              <a:rPr sz="1700" b="0" i="0">
                 <a:solidFill>
                   <a:srgbClr val="181D27"/>
                 </a:solidFill>
@@ -24898,7 +24898,7 @@
               <a:t>value_counts()</a:t>
             </a:r>
             <a:r>
-              <a:rPr sz="1600" b="0" i="0">
+              <a:rPr sz="1700" b="0" i="0">
                 <a:solidFill>
                   <a:srgbClr val="181D27"/>
                 </a:solidFill>
@@ -24922,7 +24922,7 @@
               <a:buChar char="—"/>
             </a:pPr>
             <a:r>
-              <a:rPr sz="1600" b="0" i="0">
+              <a:rPr sz="1700" b="0" i="0">
                 <a:solidFill>
                   <a:srgbClr val="181D27"/>
                 </a:solidFill>
@@ -24946,7 +24946,7 @@
               <a:buChar char="—"/>
             </a:pPr>
             <a:r>
-              <a:rPr sz="1600" b="0" i="0">
+              <a:rPr sz="1700" b="0" i="0">
                 <a:solidFill>
                   <a:srgbClr val="181D27"/>
                 </a:solidFill>
@@ -24955,7 +24955,7 @@
               <a:t>Категория из </a:t>
             </a:r>
             <a:r>
-              <a:rPr sz="1600" b="1" i="0">
+              <a:rPr sz="1700" b="1" i="0">
                 <a:solidFill>
                   <a:srgbClr val="181D27"/>
                 </a:solidFill>
@@ -24964,7 +24964,7 @@
               <a:t>одного-двух объектов</a:t>
             </a:r>
             <a:r>
-              <a:rPr sz="1600" b="0" i="0">
+              <a:rPr sz="1700" b="0" i="0">
                 <a:solidFill>
                   <a:srgbClr val="181D27"/>
                 </a:solidFill>
